--- a/output/part2/deck.pptx
+++ b/output/part2/deck.pptx
@@ -4514,7 +4514,9 @@
                 <a:solidFill>
                   <a:srgbClr val="16181D"/>
                 </a:solidFill>
-                <a:latin typeface="Pretendard"/>
+                <a:latin typeface="Apple SD Gothic Neo"/>
+                <a:ea typeface="Apple SD Gothic Neo"/>
+                <a:cs typeface="Apple SD Gothic Neo"/>
               </a:rPr>
               <a:t>프론티어 AI 네이티브 팀의 조건, 무엇이 다른가</a:t>
             </a:r>
@@ -4549,7 +4551,9 @@
                 <a:solidFill>
                   <a:srgbClr val="4A4F5A"/>
                 </a:solidFill>
-                <a:latin typeface="Pretendard"/>
+                <a:latin typeface="Apple SD Gothic Neo"/>
+                <a:ea typeface="Apple SD Gothic Neo"/>
+                <a:cs typeface="Apple SD Gothic Neo"/>
               </a:rPr>
               <a:t>AI 네이티브 팀은 도구 도입이 아니라 포지션 경계를 없애는 짝작업과 리더의 선(先)전환으로 만들어진다</a:t>
             </a:r>
@@ -4584,7 +4588,9 @@
                 <a:solidFill>
                   <a:srgbClr val="4A4F5A"/>
                 </a:solidFill>
-                <a:latin typeface="Pretendard"/>
+                <a:latin typeface="Apple SD Gothic Neo"/>
+                <a:ea typeface="Apple SD Gothic Neo"/>
+                <a:cs typeface="Apple SD Gothic Neo"/>
               </a:rPr>
               <a:t>배휘동 · 황현태 · 김승권(빌더 조슈)</a:t>
             </a:r>
@@ -4688,7 +4694,9 @@
                 <a:solidFill>
                   <a:srgbClr val="16181D"/>
                 </a:solidFill>
-                <a:latin typeface="Pretendard"/>
+                <a:latin typeface="Apple SD Gothic Neo"/>
+                <a:ea typeface="Apple SD Gothic Neo"/>
+                <a:cs typeface="Apple SD Gothic Neo"/>
               </a:rPr>
               <a:t>흔한 오해 두 가지</a:t>
             </a:r>
@@ -4792,7 +4800,9 @@
                 <a:solidFill>
                   <a:srgbClr val="16181D"/>
                 </a:solidFill>
-                <a:latin typeface="Pretendard"/>
+                <a:latin typeface="Apple SD Gothic Neo"/>
+                <a:ea typeface="Apple SD Gothic Neo"/>
+                <a:cs typeface="Apple SD Gothic Neo"/>
               </a:rPr>
               <a:t>업무마다 에이전트를 만들면 부채만 남는다</a:t>
             </a:r>
@@ -4827,11 +4837,13 @@
               </a:spcAft>
             </a:pPr>
             <a:r>
-              <a:rPr sz="1900">
+              <a:rPr sz="1900" b="0">
                 <a:solidFill>
                   <a:srgbClr val="4A4F5A"/>
                 </a:solidFill>
-                <a:latin typeface="Pretendard"/>
+                <a:latin typeface="Apple SD Gothic Neo"/>
+                <a:ea typeface="Apple SD Gothic Neo"/>
+                <a:cs typeface="Apple SD Gothic Neo"/>
               </a:rPr>
               <a:t>· 업무 수만큼 전용 에이전트?</a:t>
             </a:r>
@@ -4843,11 +4855,13 @@
               </a:spcAft>
             </a:pPr>
             <a:r>
-              <a:rPr sz="1900">
+              <a:rPr sz="1900" b="0">
                 <a:solidFill>
                   <a:srgbClr val="4A4F5A"/>
                 </a:solidFill>
-                <a:latin typeface="Pretendard"/>
+                <a:latin typeface="Apple SD Gothic Neo"/>
+                <a:ea typeface="Apple SD Gothic Neo"/>
+                <a:cs typeface="Apple SD Gothic Neo"/>
               </a:rPr>
               <a:t>· 이미 일하는 범용 에이전트가 있다</a:t>
             </a:r>
@@ -4859,11 +4873,13 @@
               </a:spcAft>
             </a:pPr>
             <a:r>
-              <a:rPr sz="1900">
+              <a:rPr sz="1900" b="0">
                 <a:solidFill>
                   <a:srgbClr val="4A4F5A"/>
                 </a:solidFill>
-                <a:latin typeface="Pretendard"/>
+                <a:latin typeface="Apple SD Gothic Neo"/>
+                <a:ea typeface="Apple SD Gothic Neo"/>
+                <a:cs typeface="Apple SD Gothic Neo"/>
               </a:rPr>
               <a:t>· 쌓이면 인지도 관리도 안 된다</a:t>
             </a:r>
@@ -4875,11 +4891,13 @@
               </a:spcAft>
             </a:pPr>
             <a:r>
-              <a:rPr sz="1900">
+              <a:rPr sz="1900" b="0">
                 <a:solidFill>
                   <a:srgbClr val="4A4F5A"/>
                 </a:solidFill>
-                <a:latin typeface="Pretendard"/>
+                <a:latin typeface="Apple SD Gothic Neo"/>
+                <a:ea typeface="Apple SD Gothic Neo"/>
+                <a:cs typeface="Apple SD Gothic Neo"/>
               </a:rPr>
               <a:t>· 남는 건 에이전트에 대한 반감</a:t>
             </a:r>
@@ -4983,7 +5001,9 @@
                 <a:solidFill>
                   <a:srgbClr val="16181D"/>
                 </a:solidFill>
-                <a:latin typeface="Pretendard"/>
+                <a:latin typeface="Apple SD Gothic Neo"/>
+                <a:ea typeface="Apple SD Gothic Neo"/>
+                <a:cs typeface="Apple SD Gothic Neo"/>
               </a:rPr>
               <a:t>코딩 비용이 0이 됐다는 말은 지식이 필요 없다는 뜻이 아니다</a:t>
             </a:r>
@@ -5018,11 +5038,13 @@
               </a:spcAft>
             </a:pPr>
             <a:r>
-              <a:rPr sz="1900">
+              <a:rPr sz="1900" b="0">
                 <a:solidFill>
                   <a:srgbClr val="4A4F5A"/>
                 </a:solidFill>
-                <a:latin typeface="Pretendard"/>
+                <a:latin typeface="Apple SD Gothic Neo"/>
+                <a:ea typeface="Apple SD Gothic Neo"/>
+                <a:cs typeface="Apple SD Gothic Neo"/>
               </a:rPr>
               <a:t>· 개인용 작은 도구는 정말 그렇다</a:t>
             </a:r>
@@ -5034,11 +5056,13 @@
               </a:spcAft>
             </a:pPr>
             <a:r>
-              <a:rPr sz="1900">
+              <a:rPr sz="1900" b="0">
                 <a:solidFill>
                   <a:srgbClr val="4A4F5A"/>
                 </a:solidFill>
-                <a:latin typeface="Pretendard"/>
+                <a:latin typeface="Apple SD Gothic Neo"/>
+                <a:ea typeface="Apple SD Gothic Neo"/>
+                <a:cs typeface="Apple SD Gothic Neo"/>
               </a:rPr>
               <a:t>· 돈 받는 제품은 반대다</a:t>
             </a:r>
@@ -5050,11 +5074,13 @@
               </a:spcAft>
             </a:pPr>
             <a:r>
-              <a:rPr sz="1900">
+              <a:rPr sz="1900" b="0">
                 <a:solidFill>
                   <a:srgbClr val="4A4F5A"/>
                 </a:solidFill>
-                <a:latin typeface="Pretendard"/>
+                <a:latin typeface="Apple SD Gothic Neo"/>
+                <a:ea typeface="Apple SD Gothic Neo"/>
+                <a:cs typeface="Apple SD Gothic Neo"/>
               </a:rPr>
               <a:t>· 비용·보안·인프라·운영 효율</a:t>
             </a:r>
@@ -5066,11 +5092,13 @@
               </a:spcAft>
             </a:pPr>
             <a:r>
-              <a:rPr sz="1900">
+              <a:rPr sz="1900" b="0">
                 <a:solidFill>
                   <a:srgbClr val="4A4F5A"/>
                 </a:solidFill>
-                <a:latin typeface="Pretendard"/>
+                <a:latin typeface="Apple SD Gothic Neo"/>
+                <a:ea typeface="Apple SD Gothic Neo"/>
+                <a:cs typeface="Apple SD Gothic Neo"/>
               </a:rPr>
               <a:t>· 개발자는 죽지 않는다</a:t>
             </a:r>
@@ -5174,7 +5202,9 @@
                 <a:solidFill>
                   <a:srgbClr val="16181D"/>
                 </a:solidFill>
-                <a:latin typeface="Pretendard"/>
+                <a:latin typeface="Apple SD Gothic Neo"/>
+                <a:ea typeface="Apple SD Gothic Neo"/>
+                <a:cs typeface="Apple SD Gothic Neo"/>
               </a:rPr>
               <a:t>큰 조직의 첫 단추</a:t>
             </a:r>
@@ -5278,7 +5308,9 @@
                 <a:solidFill>
                   <a:srgbClr val="16181D"/>
                 </a:solidFill>
-                <a:latin typeface="Pretendard"/>
+                <a:latin typeface="Apple SD Gothic Neo"/>
+                <a:ea typeface="Apple SD Gothic Neo"/>
+                <a:cs typeface="Apple SD Gothic Neo"/>
               </a:rPr>
               <a:t>자동화 몇 개로는 큰 조직이 바뀌지 않는다</a:t>
             </a:r>
@@ -5313,11 +5345,13 @@
               </a:spcAft>
             </a:pPr>
             <a:r>
-              <a:rPr sz="1900">
+              <a:rPr sz="1900" b="0">
                 <a:solidFill>
                   <a:srgbClr val="4A4F5A"/>
                 </a:solidFill>
-                <a:latin typeface="Pretendard"/>
+                <a:latin typeface="Apple SD Gothic Neo"/>
+                <a:ea typeface="Apple SD Gothic Neo"/>
+                <a:cs typeface="Apple SD Gothic Neo"/>
               </a:rPr>
               <a:t>· AI 없는 전제로 설계된 조직</a:t>
             </a:r>
@@ -5329,11 +5363,13 @@
               </a:spcAft>
             </a:pPr>
             <a:r>
-              <a:rPr sz="1900">
+              <a:rPr sz="1900" b="0">
                 <a:solidFill>
                   <a:srgbClr val="4A4F5A"/>
                 </a:solidFill>
-                <a:latin typeface="Pretendard"/>
+                <a:latin typeface="Apple SD Gothic Neo"/>
+                <a:ea typeface="Apple SD Gothic Neo"/>
+                <a:cs typeface="Apple SD Gothic Neo"/>
               </a:rPr>
               <a:t>· 업무 자동화는 표면만 건드린다</a:t>
             </a:r>
@@ -5345,11 +5381,13 @@
               </a:spcAft>
             </a:pPr>
             <a:r>
-              <a:rPr sz="1900">
+              <a:rPr sz="1900" b="0">
                 <a:solidFill>
                   <a:srgbClr val="4A4F5A"/>
                 </a:solidFill>
-                <a:latin typeface="Pretendard"/>
+                <a:latin typeface="Apple SD Gothic Neo"/>
+                <a:ea typeface="Apple SD Gothic Neo"/>
+                <a:cs typeface="Apple SD Gothic Neo"/>
               </a:rPr>
               <a:t>· 임원은 의사결정 최적화에</a:t>
             </a:r>
@@ -5361,11 +5399,13 @@
               </a:spcAft>
             </a:pPr>
             <a:r>
-              <a:rPr sz="1900">
+              <a:rPr sz="1900" b="0">
                 <a:solidFill>
                   <a:srgbClr val="4A4F5A"/>
                 </a:solidFill>
-                <a:latin typeface="Pretendard"/>
+                <a:latin typeface="Apple SD Gothic Neo"/>
+                <a:ea typeface="Apple SD Gothic Neo"/>
+                <a:cs typeface="Apple SD Gothic Neo"/>
               </a:rPr>
               <a:t>· 실무는 업무 자동화에</a:t>
             </a:r>
@@ -5469,7 +5509,9 @@
                 <a:solidFill>
                   <a:srgbClr val="16181D"/>
                 </a:solidFill>
-                <a:latin typeface="Pretendard"/>
+                <a:latin typeface="Apple SD Gothic Neo"/>
+                <a:ea typeface="Apple SD Gothic Neo"/>
+                <a:cs typeface="Apple SD Gothic Neo"/>
               </a:rPr>
               <a:t>바텀업 챔피언과 탑다운 환경은 같이 가야 한다</a:t>
             </a:r>
@@ -5504,11 +5546,13 @@
               </a:spcAft>
             </a:pPr>
             <a:r>
-              <a:rPr sz="1900">
+              <a:rPr sz="1900" b="0">
                 <a:solidFill>
                   <a:srgbClr val="4A4F5A"/>
                 </a:solidFill>
-                <a:latin typeface="Pretendard"/>
+                <a:latin typeface="Apple SD Gothic Neo"/>
+                <a:ea typeface="Apple SD Gothic Neo"/>
+                <a:cs typeface="Apple SD Gothic Neo"/>
               </a:rPr>
               <a:t>· 주변에 영향 주는 사람을 키운다</a:t>
             </a:r>
@@ -5520,11 +5564,13 @@
               </a:spcAft>
             </a:pPr>
             <a:r>
-              <a:rPr sz="1900">
+              <a:rPr sz="1900" b="0">
                 <a:solidFill>
                   <a:srgbClr val="4A4F5A"/>
                 </a:solidFill>
-                <a:latin typeface="Pretendard"/>
+                <a:latin typeface="Apple SD Gothic Neo"/>
+                <a:ea typeface="Apple SD Gothic Neo"/>
+                <a:cs typeface="Apple SD Gothic Neo"/>
               </a:rPr>
               <a:t>· 명시적 리더가 아니어도 좋다</a:t>
             </a:r>
@@ -5536,11 +5582,13 @@
               </a:spcAft>
             </a:pPr>
             <a:r>
-              <a:rPr sz="1900">
+              <a:rPr sz="1900" b="0">
                 <a:solidFill>
                   <a:srgbClr val="4A4F5A"/>
                 </a:solidFill>
-                <a:latin typeface="Pretendard"/>
+                <a:latin typeface="Apple SD Gothic Neo"/>
+                <a:ea typeface="Apple SD Gothic Neo"/>
+                <a:cs typeface="Apple SD Gothic Neo"/>
               </a:rPr>
               <a:t>· C레벨은 시간·보안·비용을 푼다</a:t>
             </a:r>
@@ -5552,11 +5600,13 @@
               </a:spcAft>
             </a:pPr>
             <a:r>
-              <a:rPr sz="1900">
+              <a:rPr sz="1900" b="0">
                 <a:solidFill>
                   <a:srgbClr val="4A4F5A"/>
                 </a:solidFill>
-                <a:latin typeface="Pretendard"/>
+                <a:latin typeface="Apple SD Gothic Neo"/>
+                <a:ea typeface="Apple SD Gothic Neo"/>
+                <a:cs typeface="Apple SD Gothic Neo"/>
               </a:rPr>
               <a:t>· 전사 일괄보다 임팩트 큰 곳부터</a:t>
             </a:r>
@@ -5660,7 +5710,9 @@
                 <a:solidFill>
                   <a:srgbClr val="16181D"/>
                 </a:solidFill>
-                <a:latin typeface="Pretendard"/>
+                <a:latin typeface="Apple SD Gothic Neo"/>
+                <a:ea typeface="Apple SD Gothic Neo"/>
+                <a:cs typeface="Apple SD Gothic Neo"/>
               </a:rPr>
               <a:t>첫 단추는 꼭지점 AX — 리더가 먼저 바뀐다</a:t>
             </a:r>
@@ -5695,11 +5747,13 @@
               </a:spcAft>
             </a:pPr>
             <a:r>
-              <a:rPr sz="1900">
+              <a:rPr sz="1900" b="0">
                 <a:solidFill>
                   <a:srgbClr val="4A4F5A"/>
                 </a:solidFill>
-                <a:latin typeface="Pretendard"/>
+                <a:latin typeface="Apple SD Gothic Neo"/>
+                <a:ea typeface="Apple SD Gothic Neo"/>
+                <a:cs typeface="Apple SD Gothic Neo"/>
               </a:rPr>
               <a:t>· 임원이 생각보다 잘 하지 않는다</a:t>
             </a:r>
@@ -5711,11 +5765,13 @@
               </a:spcAft>
             </a:pPr>
             <a:r>
-              <a:rPr sz="1900">
+              <a:rPr sz="1900" b="0">
                 <a:solidFill>
                   <a:srgbClr val="4A4F5A"/>
                 </a:solidFill>
-                <a:latin typeface="Pretendard"/>
+                <a:latin typeface="Apple SD Gothic Neo"/>
+                <a:ea typeface="Apple SD Gothic Neo"/>
+                <a:cs typeface="Apple SD Gothic Neo"/>
               </a:rPr>
               <a:t>· 리더에게 더 큰 잣대를</a:t>
             </a:r>
@@ -5727,11 +5783,13 @@
               </a:spcAft>
             </a:pPr>
             <a:r>
-              <a:rPr sz="1900">
+              <a:rPr sz="1900" b="0">
                 <a:solidFill>
                   <a:srgbClr val="4A4F5A"/>
                 </a:solidFill>
-                <a:latin typeface="Pretendard"/>
+                <a:latin typeface="Apple SD Gothic Neo"/>
+                <a:ea typeface="Apple SD Gothic Neo"/>
+                <a:cs typeface="Apple SD Gothic Neo"/>
               </a:rPr>
               <a:t>· 업무의 100%를 AI로</a:t>
             </a:r>
@@ -5743,11 +5801,13 @@
               </a:spcAft>
             </a:pPr>
             <a:r>
-              <a:rPr sz="1900">
+              <a:rPr sz="1900" b="0">
                 <a:solidFill>
                   <a:srgbClr val="4A4F5A"/>
                 </a:solidFill>
-                <a:latin typeface="Pretendard"/>
+                <a:latin typeface="Apple SD Gothic Neo"/>
+                <a:ea typeface="Apple SD Gothic Neo"/>
+                <a:cs typeface="Apple SD Gothic Neo"/>
               </a:rPr>
               <a:t>· 그다음이 조직 전환의 순서</a:t>
             </a:r>
@@ -5851,7 +5911,9 @@
                 <a:solidFill>
                   <a:srgbClr val="16181D"/>
                 </a:solidFill>
-                <a:latin typeface="Pretendard"/>
+                <a:latin typeface="Apple SD Gothic Neo"/>
+                <a:ea typeface="Apple SD Gothic Neo"/>
+                <a:cs typeface="Apple SD Gothic Neo"/>
               </a:rPr>
               <a:t>직군이 아니라 역할로 재편된다</a:t>
             </a:r>
@@ -5886,11 +5948,13 @@
               </a:spcAft>
             </a:pPr>
             <a:r>
-              <a:rPr sz="1900">
+              <a:rPr sz="1900" b="0">
                 <a:solidFill>
                   <a:srgbClr val="4A4F5A"/>
                 </a:solidFill>
-                <a:latin typeface="Pretendard"/>
+                <a:latin typeface="Apple SD Gothic Neo"/>
+                <a:ea typeface="Apple SD Gothic Neo"/>
+                <a:cs typeface="Apple SD Gothic Neo"/>
               </a:rPr>
               <a:t>· 빌더·그로워·스위퍼</a:t>
             </a:r>
@@ -5902,11 +5966,13 @@
               </a:spcAft>
             </a:pPr>
             <a:r>
-              <a:rPr sz="1900">
+              <a:rPr sz="1900" b="0">
                 <a:solidFill>
                   <a:srgbClr val="4A4F5A"/>
                 </a:solidFill>
-                <a:latin typeface="Pretendard"/>
+                <a:latin typeface="Apple SD Gothic Neo"/>
+                <a:ea typeface="Apple SD Gothic Neo"/>
+                <a:cs typeface="Apple SD Gothic Neo"/>
               </a:rPr>
               <a:t>· 메인테이너·프로토타이퍼</a:t>
             </a:r>
@@ -5918,11 +5984,13 @@
               </a:spcAft>
             </a:pPr>
             <a:r>
-              <a:rPr sz="1900">
+              <a:rPr sz="1900" b="0">
                 <a:solidFill>
                   <a:srgbClr val="4A4F5A"/>
                 </a:solidFill>
-                <a:latin typeface="Pretendard"/>
+                <a:latin typeface="Apple SD Gothic Neo"/>
+                <a:ea typeface="Apple SD Gothic Neo"/>
+                <a:cs typeface="Apple SD Gothic Neo"/>
               </a:rPr>
               <a:t>· 거의 모두가 프로토타이퍼가 된다</a:t>
             </a:r>
@@ -5934,11 +6002,13 @@
               </a:spcAft>
             </a:pPr>
             <a:r>
-              <a:rPr sz="1900">
+              <a:rPr sz="1900" b="0">
                 <a:solidFill>
                   <a:srgbClr val="4A4F5A"/>
                 </a:solidFill>
-                <a:latin typeface="Pretendard"/>
+                <a:latin typeface="Apple SD Gothic Neo"/>
+                <a:ea typeface="Apple SD Gothic Neo"/>
+                <a:cs typeface="Apple SD Gothic Neo"/>
               </a:rPr>
               <a:t>· 메인테이너가 플랫폼을 맡는다</a:t>
             </a:r>
@@ -6042,7 +6112,9 @@
                 <a:solidFill>
                   <a:srgbClr val="16181D"/>
                 </a:solidFill>
-                <a:latin typeface="Pretendard"/>
+                <a:latin typeface="Apple SD Gothic Neo"/>
+                <a:ea typeface="Apple SD Gothic Neo"/>
+                <a:cs typeface="Apple SD Gothic Neo"/>
               </a:rPr>
               <a:t>정리하면</a:t>
             </a:r>
@@ -6077,11 +6149,13 @@
               </a:spcAft>
             </a:pPr>
             <a:r>
-              <a:rPr sz="1900">
+              <a:rPr sz="1900" b="0">
                 <a:solidFill>
                   <a:srgbClr val="4A4F5A"/>
                 </a:solidFill>
-                <a:latin typeface="Pretendard"/>
+                <a:latin typeface="Apple SD Gothic Neo"/>
+                <a:ea typeface="Apple SD Gothic Neo"/>
+                <a:cs typeface="Apple SD Gothic Neo"/>
               </a:rPr>
               <a:t>· 포지션 경계를 지우는 것이 조건</a:t>
             </a:r>
@@ -6093,11 +6167,13 @@
               </a:spcAft>
             </a:pPr>
             <a:r>
-              <a:rPr sz="1900">
+              <a:rPr sz="1900" b="0">
                 <a:solidFill>
                   <a:srgbClr val="4A4F5A"/>
                 </a:solidFill>
-                <a:latin typeface="Pretendard"/>
+                <a:latin typeface="Apple SD Gothic Neo"/>
+                <a:ea typeface="Apple SD Gothic Neo"/>
+                <a:cs typeface="Apple SD Gothic Neo"/>
               </a:rPr>
               <a:t>· 교육이 아니라 짝작업으로</a:t>
             </a:r>
@@ -6109,11 +6185,13 @@
               </a:spcAft>
             </a:pPr>
             <a:r>
-              <a:rPr sz="1900">
+              <a:rPr sz="1900" b="0">
                 <a:solidFill>
                   <a:srgbClr val="4A4F5A"/>
                 </a:solidFill>
-                <a:latin typeface="Pretendard"/>
+                <a:latin typeface="Apple SD Gothic Neo"/>
+                <a:ea typeface="Apple SD Gothic Neo"/>
+                <a:cs typeface="Apple SD Gothic Neo"/>
               </a:rPr>
               <a:t>· 특수 에이전트를 양산하지 않는다</a:t>
             </a:r>
@@ -6125,11 +6203,13 @@
               </a:spcAft>
             </a:pPr>
             <a:r>
-              <a:rPr sz="1900">
+              <a:rPr sz="1900" b="0">
                 <a:solidFill>
                   <a:srgbClr val="4A4F5A"/>
                 </a:solidFill>
-                <a:latin typeface="Pretendard"/>
+                <a:latin typeface="Apple SD Gothic Neo"/>
+                <a:ea typeface="Apple SD Gothic Neo"/>
+                <a:cs typeface="Apple SD Gothic Neo"/>
               </a:rPr>
               <a:t>· 리더가 먼저 전환한다</a:t>
             </a:r>
@@ -6233,7 +6313,9 @@
                 <a:solidFill>
                   <a:srgbClr val="16181D"/>
                 </a:solidFill>
-                <a:latin typeface="Pretendard"/>
+                <a:latin typeface="Apple SD Gothic Neo"/>
+                <a:ea typeface="Apple SD Gothic Neo"/>
+                <a:cs typeface="Apple SD Gothic Neo"/>
               </a:rPr>
               <a:t>네 가지를 다룬다</a:t>
             </a:r>
@@ -6268,11 +6350,13 @@
               </a:spcAft>
             </a:pPr>
             <a:r>
-              <a:rPr sz="1900">
+              <a:rPr sz="1900" b="0">
                 <a:solidFill>
                   <a:srgbClr val="4A4F5A"/>
                 </a:solidFill>
-                <a:latin typeface="Pretendard"/>
+                <a:latin typeface="Apple SD Gothic Neo"/>
+                <a:ea typeface="Apple SD Gothic Neo"/>
+                <a:cs typeface="Apple SD Gothic Neo"/>
               </a:rPr>
               <a:t>· AI 네이티브 팀의 정의</a:t>
             </a:r>
@@ -6284,11 +6368,13 @@
               </a:spcAft>
             </a:pPr>
             <a:r>
-              <a:rPr sz="1900">
+              <a:rPr sz="1900" b="0">
                 <a:solidFill>
                   <a:srgbClr val="4A4F5A"/>
                 </a:solidFill>
-                <a:latin typeface="Pretendard"/>
+                <a:latin typeface="Apple SD Gothic Neo"/>
+                <a:ea typeface="Apple SD Gothic Neo"/>
+                <a:cs typeface="Apple SD Gothic Neo"/>
               </a:rPr>
               <a:t>· 조직을 바꾸는 방법과 평가</a:t>
             </a:r>
@@ -6300,11 +6386,13 @@
               </a:spcAft>
             </a:pPr>
             <a:r>
-              <a:rPr sz="1900">
+              <a:rPr sz="1900" b="0">
                 <a:solidFill>
                   <a:srgbClr val="4A4F5A"/>
                 </a:solidFill>
-                <a:latin typeface="Pretendard"/>
+                <a:latin typeface="Apple SD Gothic Neo"/>
+                <a:ea typeface="Apple SD Gothic Neo"/>
+                <a:cs typeface="Apple SD Gothic Neo"/>
               </a:rPr>
               <a:t>· 가장 흔한 두 가지 오해</a:t>
             </a:r>
@@ -6316,11 +6404,13 @@
               </a:spcAft>
             </a:pPr>
             <a:r>
-              <a:rPr sz="1900">
+              <a:rPr sz="1900" b="0">
                 <a:solidFill>
                   <a:srgbClr val="4A4F5A"/>
                 </a:solidFill>
-                <a:latin typeface="Pretendard"/>
+                <a:latin typeface="Apple SD Gothic Neo"/>
+                <a:ea typeface="Apple SD Gothic Neo"/>
+                <a:cs typeface="Apple SD Gothic Neo"/>
               </a:rPr>
               <a:t>· 큰 조직의 첫 단추</a:t>
             </a:r>
@@ -6424,7 +6514,9 @@
                 <a:solidFill>
                   <a:srgbClr val="16181D"/>
                 </a:solidFill>
-                <a:latin typeface="Pretendard"/>
+                <a:latin typeface="Apple SD Gothic Neo"/>
+                <a:ea typeface="Apple SD Gothic Neo"/>
+                <a:cs typeface="Apple SD Gothic Neo"/>
               </a:rPr>
               <a:t>AI와 함께 루프를 도는 것이 일상이면 AI 네이티브다</a:t>
             </a:r>
@@ -6459,11 +6551,13 @@
               </a:spcAft>
             </a:pPr>
             <a:r>
-              <a:rPr sz="1900">
+              <a:rPr sz="1900" b="0">
                 <a:solidFill>
                   <a:srgbClr val="4A4F5A"/>
                 </a:solidFill>
-                <a:latin typeface="Pretendard"/>
+                <a:latin typeface="Apple SD Gothic Neo"/>
+                <a:ea typeface="Apple SD Gothic Neo"/>
+                <a:cs typeface="Apple SD Gothic Neo"/>
               </a:rPr>
               <a:t>· 빌드-메저-런을 AI가 함께 돈다</a:t>
             </a:r>
@@ -6475,11 +6569,13 @@
               </a:spcAft>
             </a:pPr>
             <a:r>
-              <a:rPr sz="1900">
+              <a:rPr sz="1900" b="0">
                 <a:solidFill>
                   <a:srgbClr val="4A4F5A"/>
                 </a:solidFill>
-                <a:latin typeface="Pretendard"/>
+                <a:latin typeface="Apple SD Gothic Neo"/>
+                <a:ea typeface="Apple SD Gothic Neo"/>
+                <a:cs typeface="Apple SD Gothic Neo"/>
               </a:rPr>
               <a:t>· 제품뿐 아니라 조직과 개인에도</a:t>
             </a:r>
@@ -6491,11 +6587,13 @@
               </a:spcAft>
             </a:pPr>
             <a:r>
-              <a:rPr sz="1900">
+              <a:rPr sz="1900" b="0">
                 <a:solidFill>
                   <a:srgbClr val="4A4F5A"/>
                 </a:solidFill>
-                <a:latin typeface="Pretendard"/>
+                <a:latin typeface="Apple SD Gothic Neo"/>
+                <a:ea typeface="Apple SD Gothic Neo"/>
+                <a:cs typeface="Apple SD Gothic Neo"/>
               </a:rPr>
               <a:t>· 구성원 전원의 일상이 될 것</a:t>
             </a:r>
@@ -6507,11 +6605,13 @@
               </a:spcAft>
             </a:pPr>
             <a:r>
-              <a:rPr sz="1900">
+              <a:rPr sz="1900" b="0">
                 <a:solidFill>
                   <a:srgbClr val="4A4F5A"/>
                 </a:solidFill>
-                <a:latin typeface="Pretendard"/>
+                <a:latin typeface="Apple SD Gothic Neo"/>
+                <a:ea typeface="Apple SD Gothic Neo"/>
+                <a:cs typeface="Apple SD Gothic Neo"/>
               </a:rPr>
               <a:t>· 회사는 그 환경을 갖출 것</a:t>
             </a:r>
@@ -6615,7 +6715,9 @@
                 <a:solidFill>
                   <a:srgbClr val="16181D"/>
                 </a:solidFill>
-                <a:latin typeface="Pretendard"/>
+                <a:latin typeface="Apple SD Gothic Neo"/>
+                <a:ea typeface="Apple SD Gothic Neo"/>
+                <a:cs typeface="Apple SD Gothic Neo"/>
               </a:rPr>
               <a:t>AI 네이티브 팀에는 포지션 구분이 없다</a:t>
             </a:r>
@@ -6650,11 +6752,13 @@
               </a:spcAft>
             </a:pPr>
             <a:r>
-              <a:rPr sz="1900">
+              <a:rPr sz="1900" b="0">
                 <a:solidFill>
                   <a:srgbClr val="4A4F5A"/>
                 </a:solidFill>
-                <a:latin typeface="Pretendard"/>
+                <a:latin typeface="Apple SD Gothic Neo"/>
+                <a:ea typeface="Apple SD Gothic Neo"/>
+                <a:cs typeface="Apple SD Gothic Neo"/>
               </a:rPr>
               <a:t>· 세일즈 매니저 한 명이</a:t>
             </a:r>
@@ -6666,11 +6770,13 @@
               </a:spcAft>
             </a:pPr>
             <a:r>
-              <a:rPr sz="1900">
+              <a:rPr sz="1900" b="0">
                 <a:solidFill>
                   <a:srgbClr val="4A4F5A"/>
                 </a:solidFill>
-                <a:latin typeface="Pretendard"/>
+                <a:latin typeface="Apple SD Gothic Neo"/>
+                <a:ea typeface="Apple SD Gothic Neo"/>
+                <a:cs typeface="Apple SD Gothic Neo"/>
               </a:rPr>
               <a:t>· 리드 발굴부터 딜 클로징까지</a:t>
             </a:r>
@@ -6682,11 +6788,13 @@
               </a:spcAft>
             </a:pPr>
             <a:r>
-              <a:rPr sz="1900">
+              <a:rPr sz="1900" b="0">
                 <a:solidFill>
                   <a:srgbClr val="4A4F5A"/>
                 </a:solidFill>
-                <a:latin typeface="Pretendard"/>
+                <a:latin typeface="Apple SD Gothic Neo"/>
+                <a:ea typeface="Apple SD Gothic Neo"/>
+                <a:cs typeface="Apple SD Gothic Neo"/>
               </a:rPr>
               <a:t>· CS·개발·마케팅 소재까지</a:t>
             </a:r>
@@ -6698,11 +6806,13 @@
               </a:spcAft>
             </a:pPr>
             <a:r>
-              <a:rPr sz="1900">
+              <a:rPr sz="1900" b="0">
                 <a:solidFill>
                   <a:srgbClr val="4A4F5A"/>
                 </a:solidFill>
-                <a:latin typeface="Pretendard"/>
+                <a:latin typeface="Apple SD Gothic Neo"/>
+                <a:ea typeface="Apple SD Gothic Neo"/>
+                <a:cs typeface="Apple SD Gothic Neo"/>
               </a:rPr>
               <a:t>· 도구를 병렬로 돌리며 수행</a:t>
             </a:r>
@@ -6806,7 +6916,9 @@
                 <a:solidFill>
                   <a:srgbClr val="16181D"/>
                 </a:solidFill>
-                <a:latin typeface="Pretendard"/>
+                <a:latin typeface="Apple SD Gothic Neo"/>
+                <a:ea typeface="Apple SD Gothic Neo"/>
+                <a:cs typeface="Apple SD Gothic Neo"/>
               </a:rPr>
               <a:t>'비개발자'라는 말이 성립하지 않게 됐다</a:t>
             </a:r>
@@ -6841,11 +6953,13 @@
               </a:spcAft>
             </a:pPr>
             <a:r>
-              <a:rPr sz="1900">
+              <a:rPr sz="1900" b="0">
                 <a:solidFill>
                   <a:srgbClr val="4A4F5A"/>
                 </a:solidFill>
-                <a:latin typeface="Pretendard"/>
+                <a:latin typeface="Apple SD Gothic Neo"/>
+                <a:ea typeface="Apple SD Gothic Neo"/>
+                <a:cs typeface="Apple SD Gothic Neo"/>
               </a:rPr>
               <a:t>· 직군 구분 자체가 모호해졌다</a:t>
             </a:r>
@@ -6857,11 +6971,13 @@
               </a:spcAft>
             </a:pPr>
             <a:r>
-              <a:rPr sz="1900">
+              <a:rPr sz="1900" b="0">
                 <a:solidFill>
                   <a:srgbClr val="4A4F5A"/>
                 </a:solidFill>
-                <a:latin typeface="Pretendard"/>
+                <a:latin typeface="Apple SD Gothic Neo"/>
+                <a:ea typeface="Apple SD Gothic Neo"/>
+                <a:cs typeface="Apple SD Gothic Neo"/>
               </a:rPr>
               <a:t>· 마케팅 담당자가 직접 개발한다</a:t>
             </a:r>
@@ -6873,11 +6989,13 @@
               </a:spcAft>
             </a:pPr>
             <a:r>
-              <a:rPr sz="1900">
+              <a:rPr sz="1900" b="0">
                 <a:solidFill>
                   <a:srgbClr val="4A4F5A"/>
                 </a:solidFill>
-                <a:latin typeface="Pretendard"/>
+                <a:latin typeface="Apple SD Gothic Neo"/>
+                <a:ea typeface="Apple SD Gothic Neo"/>
+                <a:cs typeface="Apple SD Gothic Neo"/>
               </a:rPr>
               <a:t>· 오퍼레이션 리드도 마찬가지</a:t>
             </a:r>
@@ -6889,11 +7007,13 @@
               </a:spcAft>
             </a:pPr>
             <a:r>
-              <a:rPr sz="1900">
+              <a:rPr sz="1900" b="0">
                 <a:solidFill>
                   <a:srgbClr val="4A4F5A"/>
                 </a:solidFill>
-                <a:latin typeface="Pretendard"/>
+                <a:latin typeface="Apple SD Gothic Neo"/>
+                <a:ea typeface="Apple SD Gothic Neo"/>
+                <a:cs typeface="Apple SD Gothic Neo"/>
               </a:rPr>
               <a:t>· 구분이 있는 쪽이 되물을 일</a:t>
             </a:r>
@@ -6997,7 +7117,9 @@
                 <a:solidFill>
                   <a:srgbClr val="16181D"/>
                 </a:solidFill>
-                <a:latin typeface="Pretendard"/>
+                <a:latin typeface="Apple SD Gothic Neo"/>
+                <a:ea typeface="Apple SD Gothic Neo"/>
+                <a:cs typeface="Apple SD Gothic Neo"/>
               </a:rPr>
               <a:t>전환은 교육이 아니라 짝작업으로</a:t>
             </a:r>
@@ -7101,7 +7223,9 @@
                 <a:solidFill>
                   <a:srgbClr val="16181D"/>
                 </a:solidFill>
-                <a:latin typeface="Pretendard"/>
+                <a:latin typeface="Apple SD Gothic Neo"/>
+                <a:ea typeface="Apple SD Gothic Neo"/>
+                <a:cs typeface="Apple SD Gothic Neo"/>
               </a:rPr>
               <a:t>잘하는 사람이 가르치는 교육은 대부분 실패했다</a:t>
             </a:r>
@@ -7136,11 +7260,13 @@
               </a:spcAft>
             </a:pPr>
             <a:r>
-              <a:rPr sz="1900">
+              <a:rPr sz="1900" b="0">
                 <a:solidFill>
                   <a:srgbClr val="4A4F5A"/>
                 </a:solidFill>
-                <a:latin typeface="Pretendard"/>
+                <a:latin typeface="Apple SD Gothic Neo"/>
+                <a:ea typeface="Apple SD Gothic Neo"/>
+                <a:cs typeface="Apple SD Gothic Neo"/>
               </a:rPr>
               <a:t>· 세미나·교육은 효과가 없었다</a:t>
             </a:r>
@@ -7152,11 +7278,13 @@
               </a:spcAft>
             </a:pPr>
             <a:r>
-              <a:rPr sz="1900">
+              <a:rPr sz="1900" b="0">
                 <a:solidFill>
                   <a:srgbClr val="4A4F5A"/>
                 </a:solidFill>
-                <a:latin typeface="Pretendard"/>
+                <a:latin typeface="Apple SD Gothic Neo"/>
+                <a:ea typeface="Apple SD Gothic Neo"/>
+                <a:cs typeface="Apple SD Gothic Neo"/>
               </a:rPr>
               <a:t>· 리터러시 높은 사람과 낮은 사람</a:t>
             </a:r>
@@ -7168,11 +7296,13 @@
               </a:spcAft>
             </a:pPr>
             <a:r>
-              <a:rPr sz="1900">
+              <a:rPr sz="1900" b="0">
                 <a:solidFill>
                   <a:srgbClr val="4A4F5A"/>
                 </a:solidFill>
-                <a:latin typeface="Pretendard"/>
+                <a:latin typeface="Apple SD Gothic Neo"/>
+                <a:ea typeface="Apple SD Gothic Neo"/>
+                <a:cs typeface="Apple SD Gothic Neo"/>
               </a:rPr>
               <a:t>· 짝지어 하루를 통째로 쓴다</a:t>
             </a:r>
@@ -7184,11 +7314,13 @@
               </a:spcAft>
             </a:pPr>
             <a:r>
-              <a:rPr sz="1900">
+              <a:rPr sz="1900" b="0">
                 <a:solidFill>
                   <a:srgbClr val="4A4F5A"/>
                 </a:solidFill>
-                <a:latin typeface="Pretendard"/>
+                <a:latin typeface="Apple SD Gothic Neo"/>
+                <a:ea typeface="Apple SD Gothic Neo"/>
+                <a:cs typeface="Apple SD Gothic Neo"/>
               </a:rPr>
               <a:t>· 월 1회, 테마를 바꿔가며</a:t>
             </a:r>
@@ -7292,7 +7424,9 @@
                 <a:solidFill>
                   <a:srgbClr val="16181D"/>
                 </a:solidFill>
-                <a:latin typeface="Pretendard"/>
+                <a:latin typeface="Apple SD Gothic Neo"/>
+                <a:ea typeface="Apple SD Gothic Neo"/>
+                <a:cs typeface="Apple SD Gothic Neo"/>
               </a:rPr>
               <a:t>AI 없이는 못 끝낼 양의 일을 계속 준다</a:t>
             </a:r>
@@ -7327,11 +7461,13 @@
               </a:spcAft>
             </a:pPr>
             <a:r>
-              <a:rPr sz="1900">
+              <a:rPr sz="1900" b="0">
                 <a:solidFill>
                   <a:srgbClr val="4A4F5A"/>
                 </a:solidFill>
-                <a:latin typeface="Pretendard"/>
+                <a:latin typeface="Apple SD Gothic Neo"/>
+                <a:ea typeface="Apple SD Gothic Neo"/>
+                <a:cs typeface="Apple SD Gothic Neo"/>
               </a:rPr>
               <a:t>· 매일, 몇 달간 지속해서</a:t>
             </a:r>
@@ -7343,11 +7479,13 @@
               </a:spcAft>
             </a:pPr>
             <a:r>
-              <a:rPr sz="1900">
+              <a:rPr sz="1900" b="0">
                 <a:solidFill>
                   <a:srgbClr val="4A4F5A"/>
                 </a:solidFill>
-                <a:latin typeface="Pretendard"/>
+                <a:latin typeface="Apple SD Gothic Neo"/>
+                <a:ea typeface="Apple SD Gothic Neo"/>
+                <a:cs typeface="Apple SD Gothic Neo"/>
               </a:rPr>
               <a:t>· 만족스러운 결과가 날 때까지</a:t>
             </a:r>
@@ -7359,11 +7497,13 @@
               </a:spcAft>
             </a:pPr>
             <a:r>
-              <a:rPr sz="1900">
+              <a:rPr sz="1900" b="0">
                 <a:solidFill>
                   <a:srgbClr val="4A4F5A"/>
                 </a:solidFill>
-                <a:latin typeface="Pretendard"/>
+                <a:latin typeface="Apple SD Gothic Neo"/>
+                <a:ea typeface="Apple SD Gothic Neo"/>
+                <a:cs typeface="Apple SD Gothic Neo"/>
               </a:rPr>
               <a:t>· 특정 시간엔 다른 도구 금지</a:t>
             </a:r>
@@ -7375,11 +7515,13 @@
               </a:spcAft>
             </a:pPr>
             <a:r>
-              <a:rPr sz="1900">
+              <a:rPr sz="1900" b="0">
                 <a:solidFill>
                   <a:srgbClr val="4A4F5A"/>
                 </a:solidFill>
-                <a:latin typeface="Pretendard"/>
+                <a:latin typeface="Apple SD Gothic Neo"/>
+                <a:ea typeface="Apple SD Gothic Neo"/>
+                <a:cs typeface="Apple SD Gothic Neo"/>
               </a:rPr>
               <a:t>· 반강제 장치가 필요하다</a:t>
             </a:r>
@@ -7483,7 +7625,9 @@
                 <a:solidFill>
                   <a:srgbClr val="16181D"/>
                 </a:solidFill>
-                <a:latin typeface="Pretendard"/>
+                <a:latin typeface="Apple SD Gothic Neo"/>
+                <a:ea typeface="Apple SD Gothic Neo"/>
+                <a:cs typeface="Apple SD Gothic Neo"/>
               </a:rPr>
               <a:t>토큰 사용량이 아니라 원래 지표로 평가한다</a:t>
             </a:r>
@@ -7518,11 +7662,13 @@
               </a:spcAft>
             </a:pPr>
             <a:r>
-              <a:rPr sz="1900">
+              <a:rPr sz="1900" b="0">
                 <a:solidFill>
                   <a:srgbClr val="4A4F5A"/>
                 </a:solidFill>
-                <a:latin typeface="Pretendard"/>
+                <a:latin typeface="Apple SD Gothic Neo"/>
+                <a:ea typeface="Apple SD Gothic Neo"/>
+                <a:cs typeface="Apple SD Gothic Neo"/>
               </a:rPr>
               <a:t>· 사용량은 초기 유도용일 뿐</a:t>
             </a:r>
@@ -7534,11 +7680,13 @@
               </a:spcAft>
             </a:pPr>
             <a:r>
-              <a:rPr sz="1900">
+              <a:rPr sz="1900" b="0">
                 <a:solidFill>
                   <a:srgbClr val="4A4F5A"/>
                 </a:solidFill>
-                <a:latin typeface="Pretendard"/>
+                <a:latin typeface="Apple SD Gothic Neo"/>
+                <a:ea typeface="Apple SD Gothic Neo"/>
+                <a:cs typeface="Apple SD Gothic Neo"/>
               </a:rPr>
               <a:t>· 월급의 기준으로는 나쁘다</a:t>
             </a:r>
@@ -7550,11 +7698,13 @@
               </a:spcAft>
             </a:pPr>
             <a:r>
-              <a:rPr sz="1900">
+              <a:rPr sz="1900" b="0">
                 <a:solidFill>
                   <a:srgbClr val="4A4F5A"/>
                 </a:solidFill>
-                <a:latin typeface="Pretendard"/>
+                <a:latin typeface="Apple SD Gothic Neo"/>
+                <a:ea typeface="Apple SD Gothic Neo"/>
+                <a:cs typeface="Apple SD Gothic Neo"/>
               </a:rPr>
               <a:t>· 피처 리드 타임은 줄었는가</a:t>
             </a:r>
@@ -7566,11 +7716,13 @@
               </a:spcAft>
             </a:pPr>
             <a:r>
-              <a:rPr sz="1900">
+              <a:rPr sz="1900" b="0">
                 <a:solidFill>
                   <a:srgbClr val="4A4F5A"/>
                 </a:solidFill>
-                <a:latin typeface="Pretendard"/>
+                <a:latin typeface="Apple SD Gothic Neo"/>
+                <a:ea typeface="Apple SD Gothic Neo"/>
+                <a:cs typeface="Apple SD Gothic Neo"/>
               </a:rPr>
               <a:t>· 핫픽스는 줄었는가</a:t>
             </a:r>
